--- a/decks/englang-opinion/englang-opinion_ch3_ideas-and-openings.pptx
+++ b/decks/englang-opinion/englang-opinion_ch3_ideas-and-openings.pptx
@@ -125,29 +125,29 @@
   <p:extLst>
     <p:ext uri="{521415D9-36F7-43E2-AB2F-B90AF26B5E84}">
       <p14:sectionLst xmlns:p14="http://schemas.microsoft.com/office/powerpoint/2010/main">
-        <p14:section name="Opening" id="{08604f06-505a-6f8a-8a86-8a5382384b44}">
+        <p14:section name="Opening" id="{b82a8688-eed8-7e24-5673-d053b38a8ff3}">
           <p14:sldIdLst>
             <p14:sldId id="256"/>
           </p14:sldIdLst>
         </p14:section>
-        <p14:section name="Gate" id="{109d5bca-e114-f7f1-385b-1d4f198bb0d6}">
+        <p14:section name="Gate" id="{b258e3a8-8a28-a77a-86b7-7e4e0b514f06}">
           <p14:sldIdLst>
             <p14:sldId id="257"/>
             <p14:sldId id="258"/>
           </p14:sldIdLst>
         </p14:section>
-        <p14:section name="Pre-teach" id="{3baccddd-a44e-8b99-953d-6623cfb63156}">
+        <p14:section name="Pre-teach" id="{70ba550e-a685-cf53-e1be-9d5cae06b77c}">
           <p14:sldIdLst>
             <p14:sldId id="259"/>
           </p14:sldIdLst>
         </p14:section>
-        <p14:section name="Read-along" id="{42ca3250-07eb-966e-37d2-839191e17966}">
+        <p14:section name="Read-along" id="{97472766-beac-c5ed-160f-fe1e00ba134a}">
           <p14:sldIdLst>
             <p14:sldId id="260"/>
             <p14:sldId id="261"/>
           </p14:sldIdLst>
         </p14:section>
-        <p14:section name="Teach" id="{ecc735cb-10ae-12d4-4019-12ac13262e3e}">
+        <p14:section name="Teach" id="{38d07ee7-bb43-9a56-7069-61169e013c9d}">
           <p14:sldIdLst>
             <p14:sldId id="262"/>
             <p14:sldId id="263"/>
@@ -156,7 +156,7 @@
             <p14:sldId id="266"/>
           </p14:sldIdLst>
         </p14:section>
-        <p14:section name="Routes" id="{d7b2ab8a-6ea3-ab2c-82e7-f06d606fd3c5}">
+        <p14:section name="Routes" id="{96f841da-1e6c-2cbe-fea7-b77ec23c70d3}">
           <p14:sldIdLst>
             <p14:sldId id="267"/>
             <p14:sldId id="268"/>
@@ -164,12 +164,12 @@
             <p14:sldId id="270"/>
           </p14:sldIdLst>
         </p14:section>
-        <p14:section name="Close" id="{92c8e3d0-3916-5730-894b-29bc366a48f7}">
+        <p14:section name="Close" id="{e64023d9-2cb2-8507-6656-3efc543f151f}">
           <p14:sldIdLst>
             <p14:sldId id="271"/>
           </p14:sldIdLst>
         </p14:section>
-        <p14:section name="Answers" id="{64967121-da09-f465-8f40-c94b606a04c2}">
+        <p14:section name="Answers" id="{2bf18fea-c5cd-c1c3-9931-c2c6ced6ce84}">
           <p14:sldIdLst>
             <p14:sldId id="272"/>
             <p14:sldId id="273"/>
@@ -1233,7 +1233,7 @@
               <a:rPr lang="en-US" dirty="0"/>
               <a:t>Exit ticket — individual, silent, on a slip or mini-whiteboard. Recall before help: no notes, no lanes, no hints. Collect before pupils leave.
 Question: Which of these counts as an event you could review?
-Answer: D   A family walk on a Sunday. Anything can be an event: dinner, a walk, a birthday. The writing is what is judged, not the event.
+Answer: C   A family walk on a Sunday. Anything can be an event: dinner, a walk, a birthday. The writing is what is judged, not the event.
 Source of this question: gate item 1 re-asked (options rotated) — this chapter has no third quick-check module.
 The ebook also holds task 3, "Writing practice: the first paragraph", for homework or the next lesson's do now.
 Sort the slips: correct → ready to move on; incorrect → start next lesson in the pre-teach group, with the read-along and the Support lane. Same destination next time.</a:t>
@@ -1507,7 +1507,7 @@
             <a:r>
               <a:rPr lang="en-US" dirty="0"/>
               <a:t>Answers — exit ticket: Exit ticket. Reveal the answer; pupils mark their own work in a different colour, then read the "why" together. Same destination for every lane, so one answer serves the whole class.
-Answer: D   A family walk on a Sunday
+Answer: C   A family walk on a Sunday
 Why: Anything can be an event: dinner, a walk, a birthday. The writing is what is judged, not the event.
 Ask a Support pupil to explain one step, and a Stretch pupil to share their extension.</a:t>
             </a:r>
@@ -1598,9 +1598,9 @@
             <a:r>
               <a:rPr lang="en-US" dirty="0"/>
               <a:t>Do now — retrieval. Silent, no notes, no help: recall comes before any support. Give about four minutes.
-1. Which of these counts as an event you could review?  →  A   A family walk on a Sunday
+1. Which of these counts as an event you could review?  →  D   A family walk on a Sunday
 2. A ___ question is asked for effect and does not need an answer.  →  rhetorical
-3. Which of these openings is a triple?  →  C   “Mud on my boots, rain down my neck, a hot dog in each hand”
+3. Which of these openings is a triple?  →  B   “Mud on my boots, rain down my neck, a hot dog in each hand”
 Circulate: who gets 3/3 (Stretch route), 2/3 (Core), 0–1 (Support)? Use this to route pupils later in the lesson.</a:t>
             </a:r>
             <a:endParaRPr lang="en-US" dirty="0"/>
@@ -1690,9 +1690,9 @@
             <a:r>
               <a:rPr lang="en-US" dirty="0"/>
               <a:t>Answers — pupils mark their own in a different colour, then hands up for 3/3, 2/3, 1/3.
-1. A   A family walk on a Sunday. Anything can be an event: dinner, a walk, a birthday. The writing is what is judged, not the event.
+1. D   A family walk on a Sunday. Anything can be an event: dinner, a walk, a birthday. The writing is what is judged, not the event.
 2. rhetorical. A rhetorical question is asked for effect; the reader answers it silently and reads on.
-3. C   “Mud on my boots, rain down my neck, a hot dog in each hand”. Mud, rain and a hot dog: three things in a row make a triple.
+3. B   “Mud on my boots, rain down my neck, a hot dog in each hand”. Mud, rain and a hot dog: three things in a row make a triple.
 Say the route each score points to: 3/3 Stretch, 2/3 Core, 0–1 Support. Pupils may choose to move up.</a:t>
             </a:r>
             <a:endParaRPr lang="en-US" dirty="0"/>
@@ -8915,7 +8915,7 @@
                 <a:ea typeface="Calibri" pitchFamily="34" charset="-122"/>
                 <a:cs typeface="Calibri" pitchFamily="34" charset="-120"/>
               </a:rPr>
-              <a:t>Only a concert in a stadium</a:t>
+              <a:t>Only a cup final</a:t>
             </a:r>
             <a:endParaRPr lang="en-US" sz="2400" dirty="0"/>
           </a:p>
@@ -8952,7 +8952,7 @@
                 <a:ea typeface="Calibri" pitchFamily="34" charset="-122"/>
                 <a:cs typeface="Calibri" pitchFamily="34" charset="-120"/>
               </a:rPr>
-              <a:t>Only a cup final</a:t>
+              <a:t>Nothing ordinary; it has to be famous</a:t>
             </a:r>
             <a:endParaRPr lang="en-US" sz="2400" dirty="0"/>
           </a:p>
@@ -8989,7 +8989,7 @@
                 <a:ea typeface="Calibri" pitchFamily="34" charset="-122"/>
                 <a:cs typeface="Calibri" pitchFamily="34" charset="-120"/>
               </a:rPr>
-              <a:t>Nothing ordinary; it has to be famous</a:t>
+              <a:t>A family walk on a Sunday</a:t>
             </a:r>
             <a:endParaRPr lang="en-US" sz="2400" dirty="0"/>
           </a:p>
@@ -9026,7 +9026,7 @@
                 <a:ea typeface="Calibri" pitchFamily="34" charset="-122"/>
                 <a:cs typeface="Calibri" pitchFamily="34" charset="-120"/>
               </a:rPr>
-              <a:t>A family walk on a Sunday</a:t>
+              <a:t>Only a concert in a stadium</a:t>
             </a:r>
             <a:endParaRPr lang="en-US" sz="2400" dirty="0"/>
           </a:p>
@@ -10608,7 +10608,7 @@
                 <a:ea typeface="Cambria" pitchFamily="34" charset="-122"/>
                 <a:cs typeface="Cambria" pitchFamily="34" charset="-120"/>
               </a:rPr>
-              <a:t>D   A family walk on a Sunday</a:t>
+              <a:t>C   A family walk on a Sunday</a:t>
             </a:r>
             <a:endParaRPr lang="en-US" sz="1800" dirty="0"/>
           </a:p>
@@ -11142,7 +11142,7 @@
                 <a:ea typeface="Calibri" pitchFamily="34" charset="-122"/>
                 <a:cs typeface="Calibri" pitchFamily="34" charset="-120"/>
               </a:rPr>
-              <a:t>A family walk on a Sunday</a:t>
+              <a:t>Only a concert in a stadium</a:t>
             </a:r>
             <a:endParaRPr lang="en-US" sz="1800" dirty="0"/>
           </a:p>
@@ -11179,7 +11179,7 @@
                 <a:ea typeface="Calibri" pitchFamily="34" charset="-122"/>
                 <a:cs typeface="Calibri" pitchFamily="34" charset="-120"/>
               </a:rPr>
-              <a:t>Only a concert in a stadium</a:t>
+              <a:t>Only a cup final</a:t>
             </a:r>
             <a:endParaRPr lang="en-US" sz="1800" dirty="0"/>
           </a:p>
@@ -11216,7 +11216,7 @@
                 <a:ea typeface="Calibri" pitchFamily="34" charset="-122"/>
                 <a:cs typeface="Calibri" pitchFamily="34" charset="-120"/>
               </a:rPr>
-              <a:t>Only a cup final</a:t>
+              <a:t>Nothing ordinary; it has to be famous</a:t>
             </a:r>
             <a:endParaRPr lang="en-US" sz="1800" dirty="0"/>
           </a:p>
@@ -11253,7 +11253,7 @@
                 <a:ea typeface="Calibri" pitchFamily="34" charset="-122"/>
                 <a:cs typeface="Calibri" pitchFamily="34" charset="-120"/>
               </a:rPr>
-              <a:t>Nothing ordinary; it has to be famous</a:t>
+              <a:t>A family walk on a Sunday</a:t>
             </a:r>
             <a:endParaRPr lang="en-US" sz="1800" dirty="0"/>
           </a:p>
@@ -11655,7 +11655,7 @@
                 <a:ea typeface="Calibri" pitchFamily="34" charset="-122"/>
                 <a:cs typeface="Calibri" pitchFamily="34" charset="-120"/>
               </a:rPr>
-              <a:t>“Have you ever paid twelve pounds to sit in the dark and listen to a stranger eat crisps?”</a:t>
+              <a:t>“Picture this: a sports hall at eight in the morning”</a:t>
             </a:r>
             <a:endParaRPr lang="en-US" sz="1800" dirty="0"/>
           </a:p>
@@ -11692,7 +11692,7 @@
                 <a:ea typeface="Calibri" pitchFamily="34" charset="-122"/>
                 <a:cs typeface="Calibri" pitchFamily="34" charset="-120"/>
               </a:rPr>
-              <a:t>“Picture this: a sports hall at eight in the morning”</a:t>
+              <a:t>“Mud on my boots, rain down my neck, a hot dog in each hand”</a:t>
             </a:r>
             <a:endParaRPr lang="en-US" sz="1800" dirty="0"/>
           </a:p>
@@ -11729,7 +11729,7 @@
                 <a:ea typeface="Calibri" pitchFamily="34" charset="-122"/>
                 <a:cs typeface="Calibri" pitchFamily="34" charset="-120"/>
               </a:rPr>
-              <a:t>“Mud on my boots, rain down my neck, a hot dog in each hand”</a:t>
+              <a:t>“Have you ever paid twelve pounds to sit in the dark and listen to a stranger eat crisps?”</a:t>
             </a:r>
             <a:endParaRPr lang="en-US" sz="1800" dirty="0"/>
           </a:p>
@@ -12167,7 +12167,7 @@
                 <a:ea typeface="Calibri" pitchFamily="34" charset="-122"/>
                 <a:cs typeface="Calibri" pitchFamily="34" charset="-120"/>
               </a:rPr>
-              <a:t>A   A family walk on a Sunday</a:t>
+              <a:t>D   A family walk on a Sunday</a:t>
             </a:r>
             <a:endParaRPr lang="en-US" sz="2200" dirty="0"/>
           </a:p>
@@ -12667,7 +12667,7 @@
                 <a:ea typeface="Calibri" pitchFamily="34" charset="-122"/>
                 <a:cs typeface="Calibri" pitchFamily="34" charset="-120"/>
               </a:rPr>
-              <a:t>C   “Mud on my boots, rain down my neck, a hot dog in each hand”</a:t>
+              <a:t>B   “Mud on my boots, rain down my neck, a hot dog in each hand”</a:t>
             </a:r>
             <a:endParaRPr lang="en-US" sz="2200" dirty="0"/>
           </a:p>

--- a/decks/englang-opinion/englang-opinion_ch3_ideas-and-openings.pptx
+++ b/decks/englang-opinion/englang-opinion_ch3_ideas-and-openings.pptx
@@ -125,29 +125,29 @@
   <p:extLst>
     <p:ext uri="{521415D9-36F7-43E2-AB2F-B90AF26B5E84}">
       <p14:sectionLst xmlns:p14="http://schemas.microsoft.com/office/powerpoint/2010/main">
-        <p14:section name="Opening" id="{b82a8688-eed8-7e24-5673-d053b38a8ff3}">
+        <p14:section name="Opening" id="{3eb3d708-bcac-0684-4a62-1ad3773a031d}">
           <p14:sldIdLst>
             <p14:sldId id="256"/>
           </p14:sldIdLst>
         </p14:section>
-        <p14:section name="Gate" id="{b258e3a8-8a28-a77a-86b7-7e4e0b514f06}">
+        <p14:section name="Gate" id="{af565126-e560-85b1-48c7-9fee11d04e57}">
           <p14:sldIdLst>
             <p14:sldId id="257"/>
             <p14:sldId id="258"/>
           </p14:sldIdLst>
         </p14:section>
-        <p14:section name="Pre-teach" id="{70ba550e-a685-cf53-e1be-9d5cae06b77c}">
+        <p14:section name="Pre-teach" id="{15e3116c-9d1c-c5f3-20d0-cb6338b9ec39}">
           <p14:sldIdLst>
             <p14:sldId id="259"/>
           </p14:sldIdLst>
         </p14:section>
-        <p14:section name="Read-along" id="{97472766-beac-c5ed-160f-fe1e00ba134a}">
+        <p14:section name="Read-along" id="{b7657e3d-1370-3ed0-9738-32559cb16cf7}">
           <p14:sldIdLst>
             <p14:sldId id="260"/>
             <p14:sldId id="261"/>
           </p14:sldIdLst>
         </p14:section>
-        <p14:section name="Teach" id="{38d07ee7-bb43-9a56-7069-61169e013c9d}">
+        <p14:section name="Teach" id="{7cfec2eb-1943-f1da-b944-7dab97f8554b}">
           <p14:sldIdLst>
             <p14:sldId id="262"/>
             <p14:sldId id="263"/>
@@ -156,7 +156,7 @@
             <p14:sldId id="266"/>
           </p14:sldIdLst>
         </p14:section>
-        <p14:section name="Routes" id="{96f841da-1e6c-2cbe-fea7-b77ec23c70d3}">
+        <p14:section name="Routes" id="{85b2b31f-f73b-1147-01dd-69ceb8f0c4d1}">
           <p14:sldIdLst>
             <p14:sldId id="267"/>
             <p14:sldId id="268"/>
@@ -164,12 +164,12 @@
             <p14:sldId id="270"/>
           </p14:sldIdLst>
         </p14:section>
-        <p14:section name="Close" id="{e64023d9-2cb2-8507-6656-3efc543f151f}">
+        <p14:section name="Close" id="{5e14b20b-733a-c87d-caae-9915b19dfc5d}">
           <p14:sldIdLst>
             <p14:sldId id="271"/>
           </p14:sldIdLst>
         </p14:section>
-        <p14:section name="Answers" id="{2bf18fea-c5cd-c1c3-9931-c2c6ced6ce84}">
+        <p14:section name="Answers" id="{578986fd-c0f7-77f0-c503-92aeb12df640}">
           <p14:sldIdLst>
             <p14:sldId id="272"/>
             <p14:sldId id="273"/>
